--- a/documentation/pipeline_slide.pptx
+++ b/documentation/pipeline_slide.pptx
@@ -2520,6 +2520,14 @@
 <file path=ppt/slides/slide2.xml><?xml version="1.0" encoding="utf-8"?>
 <p:sld xmlns:a="http://schemas.openxmlformats.org/drawingml/2006/main" xmlns:r="http://schemas.openxmlformats.org/officeDocument/2006/relationships" xmlns:p="http://schemas.openxmlformats.org/presentationml/2006/main">
   <p:cSld>
+    <p:bg>
+      <p:bgPr>
+        <a:solidFill>
+          <a:srgbClr val="0F1B2D"/>
+        </a:solidFill>
+        <a:effectLst/>
+      </p:bgPr>
+    </p:bg>
     <p:spTree>
       <p:nvGrpSpPr>
         <p:cNvPr id="1" name=""/>
@@ -2536,35 +2544,107 @@
       </p:grpSpPr>
       <p:sp>
         <p:nvSpPr>
-          <p:cNvPr id="2" name="Rectangle 1">
-            <a:extLst>
-              <a:ext uri="{FF2B5EF4-FFF2-40B4-BE49-F238E27FC236}">
-                <a16:creationId xmlns:a16="http://schemas.microsoft.com/office/drawing/2014/main" id="{D3697625-1C66-8087-5319-E7C2FE8A0DE4}"/>
-              </a:ext>
-            </a:extLst>
-          </p:cNvPr>
-          <p:cNvSpPr/>
-          <p:nvPr/>
-        </p:nvSpPr>
-        <p:spPr>
-          <a:xfrm>
-            <a:off x="78154" y="1086338"/>
-            <a:ext cx="1203569" cy="562708"/>
+          <p:cNvPr id="2" name="TextBox 1"/>
+          <p:cNvSpPr txBox="1"/>
+          <p:nvPr/>
+        </p:nvSpPr>
+        <p:spPr>
+          <a:xfrm>
+            <a:off x="457200" y="182880"/>
+            <a:ext cx="8229600" cy="502920"/>
           </a:xfrm>
           <a:prstGeom prst="rect">
             <a:avLst/>
           </a:prstGeom>
+          <a:noFill/>
+        </p:spPr>
+        <p:txBody>
+          <a:bodyPr wrap="square" lIns="0" rIns="0" tIns="0" bIns="0" anchor="ctr">
+            <a:spAutoFit/>
+          </a:bodyPr>
+          <a:lstStyle/>
+          <a:p>
+            <a:pPr algn="l"/>
+            <a:r>
+              <a:rPr sz="2600" b="1" i="0">
+                <a:solidFill>
+                  <a:srgbClr val="FFFFFF"/>
+                </a:solidFill>
+                <a:latin typeface="Calibri"/>
+              </a:rPr>
+              <a:t>Black Hills Mining Impact Digital Twin</a:t>
+            </a:r>
+          </a:p>
+        </p:txBody>
+      </p:sp>
+      <p:sp>
+        <p:nvSpPr>
+          <p:cNvPr id="3" name="TextBox 2"/>
+          <p:cNvSpPr txBox="1"/>
+          <p:nvPr/>
+        </p:nvSpPr>
+        <p:spPr>
+          <a:xfrm>
+            <a:off x="457200" y="658368"/>
+            <a:ext cx="8229600" cy="292608"/>
+          </a:xfrm>
+          <a:prstGeom prst="rect">
+            <a:avLst/>
+          </a:prstGeom>
+          <a:noFill/>
+        </p:spPr>
+        <p:txBody>
+          <a:bodyPr wrap="square" lIns="0" rIns="0" tIns="0" bIns="0" anchor="ctr">
+            <a:spAutoFit/>
+          </a:bodyPr>
+          <a:lstStyle/>
+          <a:p>
+            <a:pPr algn="l"/>
+            <a:r>
+              <a:rPr sz="1100" b="0" i="0">
+                <a:solidFill>
+                  <a:srgbClr val="8BA3BE"/>
+                </a:solidFill>
+                <a:latin typeface="Calibri"/>
+              </a:rPr>
+              <a:t>Workflow — geospatial inputs · LLM harmonization · SWAT / DRASTIC process models · vulnerability outputs</a:t>
+            </a:r>
+          </a:p>
+        </p:txBody>
+      </p:sp>
+      <p:sp>
+        <p:nvSpPr>
+          <p:cNvPr id="4" name="Rounded Rectangle 3"/>
+          <p:cNvSpPr/>
+          <p:nvPr/>
+        </p:nvSpPr>
+        <p:spPr>
+          <a:xfrm>
+            <a:off x="260000" y="1080000"/>
+            <a:ext cx="1460000" cy="240000"/>
+          </a:xfrm>
+          <a:prstGeom prst="roundRect">
+            <a:avLst>
+              <a:gd name="adj" fmla="val 40000"/>
+            </a:avLst>
+          </a:prstGeom>
+          <a:solidFill>
+            <a:srgbClr val="1E3A5F"/>
+          </a:solidFill>
+          <a:ln w="12700">
+            <a:solidFill>
+              <a:srgbClr val="3B7DDD"/>
+            </a:solidFill>
+          </a:ln>
         </p:spPr>
         <p:style>
-          <a:lnRef idx="2">
-            <a:schemeClr val="accent1">
-              <a:shade val="15000"/>
-            </a:schemeClr>
+          <a:lnRef idx="1">
+            <a:schemeClr val="accent1"/>
           </a:lnRef>
-          <a:fillRef idx="1">
+          <a:fillRef idx="3">
             <a:schemeClr val="accent1"/>
           </a:fillRef>
-          <a:effectRef idx="0">
+          <a:effectRef idx="2">
             <a:schemeClr val="accent1"/>
           </a:effectRef>
           <a:fontRef idx="minor">
@@ -2576,49 +2656,77 @@
           <a:lstStyle/>
           <a:p>
             <a:pPr algn="ctr"/>
-            <a:r>
-              <a:rPr lang="en-US" sz="1100" dirty="0"/>
-              <a:t>Geospatial </a:t>
-            </a:r>
-            <a:r>
-              <a:rPr lang="en-US" sz="1100" dirty="0" err="1"/>
-              <a:t>dataç</a:t>
-            </a:r>
-            <a:endParaRPr lang="en-US" sz="1100" dirty="0"/>
-          </a:p>
-        </p:txBody>
-      </p:sp>
-      <p:sp>
-        <p:nvSpPr>
-          <p:cNvPr id="3" name="Rectangle 2">
-            <a:extLst>
-              <a:ext uri="{FF2B5EF4-FFF2-40B4-BE49-F238E27FC236}">
-                <a16:creationId xmlns:a16="http://schemas.microsoft.com/office/drawing/2014/main" id="{19D32B2D-4DDD-0BB5-9148-1C0AFC37529D}"/>
-              </a:ext>
-            </a:extLst>
-          </p:cNvPr>
-          <p:cNvSpPr/>
-          <p:nvPr/>
-        </p:nvSpPr>
-        <p:spPr>
-          <a:xfrm>
-            <a:off x="78143" y="1952673"/>
-            <a:ext cx="1203569" cy="562708"/>
+          </a:p>
+        </p:txBody>
+      </p:sp>
+      <p:sp>
+        <p:nvSpPr>
+          <p:cNvPr id="5" name="TextBox 4"/>
+          <p:cNvSpPr txBox="1"/>
+          <p:nvPr/>
+        </p:nvSpPr>
+        <p:spPr>
+          <a:xfrm>
+            <a:off x="260000" y="1080000"/>
+            <a:ext cx="1460000" cy="240000"/>
           </a:xfrm>
           <a:prstGeom prst="rect">
             <a:avLst/>
           </a:prstGeom>
+          <a:noFill/>
+        </p:spPr>
+        <p:txBody>
+          <a:bodyPr wrap="square" lIns="0" rIns="0" tIns="0" bIns="0" anchor="ctr">
+            <a:spAutoFit/>
+          </a:bodyPr>
+          <a:lstStyle/>
+          <a:p>
+            <a:pPr algn="ctr"/>
+            <a:r>
+              <a:rPr sz="1000" b="1" i="0" spc="150">
+                <a:solidFill>
+                  <a:srgbClr val="A8C8F8"/>
+                </a:solidFill>
+                <a:latin typeface="Calibri"/>
+              </a:rPr>
+              <a:t>1  ·  INPUTS</a:t>
+            </a:r>
+          </a:p>
+        </p:txBody>
+      </p:sp>
+      <p:sp>
+        <p:nvSpPr>
+          <p:cNvPr id="6" name="Rounded Rectangle 5"/>
+          <p:cNvSpPr/>
+          <p:nvPr/>
+        </p:nvSpPr>
+        <p:spPr>
+          <a:xfrm>
+            <a:off x="1940000" y="1080000"/>
+            <a:ext cx="2560000" cy="240000"/>
+          </a:xfrm>
+          <a:prstGeom prst="roundRect">
+            <a:avLst>
+              <a:gd name="adj" fmla="val 40000"/>
+            </a:avLst>
+          </a:prstGeom>
+          <a:solidFill>
+            <a:srgbClr val="3D2B00"/>
+          </a:solidFill>
+          <a:ln w="12700">
+            <a:solidFill>
+              <a:srgbClr val="D97706"/>
+            </a:solidFill>
+          </a:ln>
         </p:spPr>
         <p:style>
-          <a:lnRef idx="2">
-            <a:schemeClr val="accent1">
-              <a:shade val="15000"/>
-            </a:schemeClr>
+          <a:lnRef idx="1">
+            <a:schemeClr val="accent1"/>
           </a:lnRef>
-          <a:fillRef idx="1">
+          <a:fillRef idx="3">
             <a:schemeClr val="accent1"/>
           </a:fillRef>
-          <a:effectRef idx="0">
+          <a:effectRef idx="2">
             <a:schemeClr val="accent1"/>
           </a:effectRef>
           <a:fontRef idx="minor">
@@ -2630,44 +2738,77 @@
           <a:lstStyle/>
           <a:p>
             <a:pPr algn="ctr"/>
-            <a:r>
-              <a:rPr lang="en-US" sz="1200" dirty="0"/>
-              <a:t>TEXTs</a:t>
-            </a:r>
-          </a:p>
-        </p:txBody>
-      </p:sp>
-      <p:sp>
-        <p:nvSpPr>
-          <p:cNvPr id="4" name="Rectangle 3">
-            <a:extLst>
-              <a:ext uri="{FF2B5EF4-FFF2-40B4-BE49-F238E27FC236}">
-                <a16:creationId xmlns:a16="http://schemas.microsoft.com/office/drawing/2014/main" id="{4AD2DD8C-B6C7-58DE-4562-C90A6121EBFA}"/>
-              </a:ext>
-            </a:extLst>
-          </p:cNvPr>
-          <p:cNvSpPr/>
-          <p:nvPr/>
-        </p:nvSpPr>
-        <p:spPr>
-          <a:xfrm>
-            <a:off x="78154" y="2720242"/>
-            <a:ext cx="1293441" cy="1140558"/>
+          </a:p>
+        </p:txBody>
+      </p:sp>
+      <p:sp>
+        <p:nvSpPr>
+          <p:cNvPr id="7" name="TextBox 6"/>
+          <p:cNvSpPr txBox="1"/>
+          <p:nvPr/>
+        </p:nvSpPr>
+        <p:spPr>
+          <a:xfrm>
+            <a:off x="1940000" y="1080000"/>
+            <a:ext cx="2560000" cy="240000"/>
           </a:xfrm>
           <a:prstGeom prst="rect">
             <a:avLst/>
           </a:prstGeom>
+          <a:noFill/>
+        </p:spPr>
+        <p:txBody>
+          <a:bodyPr wrap="square" lIns="0" rIns="0" tIns="0" bIns="0" anchor="ctr">
+            <a:spAutoFit/>
+          </a:bodyPr>
+          <a:lstStyle/>
+          <a:p>
+            <a:pPr algn="ctr"/>
+            <a:r>
+              <a:rPr sz="1000" b="1" i="0" spc="150">
+                <a:solidFill>
+                  <a:srgbClr val="FBBF24"/>
+                </a:solidFill>
+                <a:latin typeface="Calibri"/>
+              </a:rPr>
+              <a:t>2  ·  HARMONIZATION</a:t>
+            </a:r>
+          </a:p>
+        </p:txBody>
+      </p:sp>
+      <p:sp>
+        <p:nvSpPr>
+          <p:cNvPr id="8" name="Rounded Rectangle 7"/>
+          <p:cNvSpPr/>
+          <p:nvPr/>
+        </p:nvSpPr>
+        <p:spPr>
+          <a:xfrm>
+            <a:off x="4720000" y="1080000"/>
+            <a:ext cx="1740000" cy="240000"/>
+          </a:xfrm>
+          <a:prstGeom prst="roundRect">
+            <a:avLst>
+              <a:gd name="adj" fmla="val 40000"/>
+            </a:avLst>
+          </a:prstGeom>
+          <a:solidFill>
+            <a:srgbClr val="0F3320"/>
+          </a:solidFill>
+          <a:ln w="12700">
+            <a:solidFill>
+              <a:srgbClr val="2E8B57"/>
+            </a:solidFill>
+          </a:ln>
         </p:spPr>
         <p:style>
-          <a:lnRef idx="2">
-            <a:schemeClr val="accent1">
-              <a:shade val="15000"/>
-            </a:schemeClr>
+          <a:lnRef idx="1">
+            <a:schemeClr val="accent1"/>
           </a:lnRef>
-          <a:fillRef idx="1">
+          <a:fillRef idx="3">
             <a:schemeClr val="accent1"/>
           </a:fillRef>
-          <a:effectRef idx="0">
+          <a:effectRef idx="2">
             <a:schemeClr val="accent1"/>
           </a:effectRef>
           <a:fontRef idx="minor">
@@ -2679,44 +2820,77 @@
           <a:lstStyle/>
           <a:p>
             <a:pPr algn="ctr"/>
-            <a:r>
-              <a:rPr lang="en-US" sz="1200" dirty="0"/>
-              <a:t>Weather data (historical and projected data)</a:t>
-            </a:r>
-          </a:p>
-        </p:txBody>
-      </p:sp>
-      <p:sp>
-        <p:nvSpPr>
-          <p:cNvPr id="5" name="Rectangle 4">
-            <a:extLst>
-              <a:ext uri="{FF2B5EF4-FFF2-40B4-BE49-F238E27FC236}">
-                <a16:creationId xmlns:a16="http://schemas.microsoft.com/office/drawing/2014/main" id="{E7155871-88B2-2241-1368-9112682C5C0D}"/>
-              </a:ext>
-            </a:extLst>
-          </p:cNvPr>
-          <p:cNvSpPr/>
-          <p:nvPr/>
-        </p:nvSpPr>
-        <p:spPr>
-          <a:xfrm>
-            <a:off x="1440146" y="1662237"/>
-            <a:ext cx="1203569" cy="857104"/>
+          </a:p>
+        </p:txBody>
+      </p:sp>
+      <p:sp>
+        <p:nvSpPr>
+          <p:cNvPr id="9" name="TextBox 8"/>
+          <p:cNvSpPr txBox="1"/>
+          <p:nvPr/>
+        </p:nvSpPr>
+        <p:spPr>
+          <a:xfrm>
+            <a:off x="4720000" y="1080000"/>
+            <a:ext cx="1740000" cy="240000"/>
           </a:xfrm>
           <a:prstGeom prst="rect">
             <a:avLst/>
           </a:prstGeom>
+          <a:noFill/>
+        </p:spPr>
+        <p:txBody>
+          <a:bodyPr wrap="square" lIns="0" rIns="0" tIns="0" bIns="0" anchor="ctr">
+            <a:spAutoFit/>
+          </a:bodyPr>
+          <a:lstStyle/>
+          <a:p>
+            <a:pPr algn="ctr"/>
+            <a:r>
+              <a:rPr sz="1000" b="1" i="0" spc="150">
+                <a:solidFill>
+                  <a:srgbClr val="6EE7A8"/>
+                </a:solidFill>
+                <a:latin typeface="Calibri"/>
+              </a:rPr>
+              <a:t>3  ·  PROCESS MODELS</a:t>
+            </a:r>
+          </a:p>
+        </p:txBody>
+      </p:sp>
+      <p:sp>
+        <p:nvSpPr>
+          <p:cNvPr id="10" name="Rounded Rectangle 9"/>
+          <p:cNvSpPr/>
+          <p:nvPr/>
+        </p:nvSpPr>
+        <p:spPr>
+          <a:xfrm>
+            <a:off x="6680000" y="1080000"/>
+            <a:ext cx="2200000" cy="240000"/>
+          </a:xfrm>
+          <a:prstGeom prst="roundRect">
+            <a:avLst>
+              <a:gd name="adj" fmla="val 40000"/>
+            </a:avLst>
+          </a:prstGeom>
+          <a:solidFill>
+            <a:srgbClr val="3B0D3A"/>
+          </a:solidFill>
+          <a:ln w="12700">
+            <a:solidFill>
+              <a:srgbClr val="C026D3"/>
+            </a:solidFill>
+          </a:ln>
         </p:spPr>
         <p:style>
-          <a:lnRef idx="2">
-            <a:schemeClr val="accent1">
-              <a:shade val="15000"/>
-            </a:schemeClr>
+          <a:lnRef idx="1">
+            <a:schemeClr val="accent1"/>
           </a:lnRef>
-          <a:fillRef idx="1">
+          <a:fillRef idx="3">
             <a:schemeClr val="accent1"/>
           </a:fillRef>
-          <a:effectRef idx="0">
+          <a:effectRef idx="2">
             <a:schemeClr val="accent1"/>
           </a:effectRef>
           <a:fontRef idx="minor">
@@ -2728,151 +2902,77 @@
           <a:lstStyle/>
           <a:p>
             <a:pPr algn="ctr"/>
-            <a:r>
-              <a:rPr lang="en-US" sz="1400" dirty="0"/>
-              <a:t>Cassie LLM adapted workflow</a:t>
-            </a:r>
-            <a:endParaRPr lang="en-US" dirty="0"/>
-          </a:p>
-        </p:txBody>
-      </p:sp>
-      <p:sp>
-        <p:nvSpPr>
-          <p:cNvPr id="6" name="TextBox 5">
-            <a:extLst>
-              <a:ext uri="{FF2B5EF4-FFF2-40B4-BE49-F238E27FC236}">
-                <a16:creationId xmlns:a16="http://schemas.microsoft.com/office/drawing/2014/main" id="{28FC18E1-C067-3D85-11F5-BD7B0643B9BE}"/>
-              </a:ext>
-            </a:extLst>
-          </p:cNvPr>
+          </a:p>
+        </p:txBody>
+      </p:sp>
+      <p:sp>
+        <p:nvSpPr>
+          <p:cNvPr id="11" name="TextBox 10"/>
           <p:cNvSpPr txBox="1"/>
           <p:nvPr/>
         </p:nvSpPr>
         <p:spPr>
           <a:xfrm>
-            <a:off x="2842881" y="1750485"/>
-            <a:ext cx="1203570" cy="461665"/>
+            <a:off x="6680000" y="1080000"/>
+            <a:ext cx="2200000" cy="240000"/>
           </a:xfrm>
           <a:prstGeom prst="rect">
             <a:avLst/>
           </a:prstGeom>
-          <a:solidFill>
-            <a:schemeClr val="accent2"/>
-          </a:solidFill>
-        </p:spPr>
-        <p:txBody>
-          <a:bodyPr wrap="square" rtlCol="0">
+          <a:noFill/>
+        </p:spPr>
+        <p:txBody>
+          <a:bodyPr wrap="square" lIns="0" rIns="0" tIns="0" bIns="0" anchor="ctr">
             <a:spAutoFit/>
           </a:bodyPr>
           <a:lstStyle/>
           <a:p>
-            <a:r>
-              <a:rPr lang="en-US" sz="1200" dirty="0" err="1"/>
-              <a:t>Geosjson</a:t>
-            </a:r>
-            <a:endParaRPr lang="en-US" sz="1200" dirty="0"/>
-          </a:p>
-          <a:p>
-            <a:r>
-              <a:rPr lang="en-US" sz="1200" dirty="0" err="1"/>
-              <a:t>Geotif</a:t>
-            </a:r>
-            <a:r>
-              <a:rPr lang="en-US" sz="1200" dirty="0"/>
-              <a:t> files</a:t>
-            </a:r>
-          </a:p>
-        </p:txBody>
-      </p:sp>
-      <p:sp>
-        <p:nvSpPr>
-          <p:cNvPr id="7" name="TextBox 6">
-            <a:extLst>
-              <a:ext uri="{FF2B5EF4-FFF2-40B4-BE49-F238E27FC236}">
-                <a16:creationId xmlns:a16="http://schemas.microsoft.com/office/drawing/2014/main" id="{8D53682E-5177-66B1-E1BF-CDA4511E2A33}"/>
-              </a:ext>
-            </a:extLst>
-          </p:cNvPr>
-          <p:cNvSpPr txBox="1"/>
-          <p:nvPr/>
-        </p:nvSpPr>
-        <p:spPr>
-          <a:xfrm>
-            <a:off x="4298938" y="809790"/>
-            <a:ext cx="1473192" cy="2585323"/>
-          </a:xfrm>
-          <a:prstGeom prst="rect">
-            <a:avLst/>
-          </a:prstGeom>
-          <a:solidFill>
-            <a:schemeClr val="accent2"/>
-          </a:solidFill>
-        </p:spPr>
-        <p:txBody>
-          <a:bodyPr wrap="square" rtlCol="0">
-            <a:spAutoFit/>
-          </a:bodyPr>
-          <a:lstStyle/>
-          <a:p>
-            <a:endParaRPr lang="en-US" dirty="0"/>
-          </a:p>
-          <a:p>
-            <a:endParaRPr lang="en-US" dirty="0"/>
-          </a:p>
-          <a:p>
-            <a:endParaRPr lang="en-US" dirty="0"/>
-          </a:p>
-          <a:p>
-            <a:endParaRPr lang="en-US" dirty="0"/>
-          </a:p>
-          <a:p>
-            <a:endParaRPr lang="en-US" dirty="0"/>
-          </a:p>
-          <a:p>
-            <a:endParaRPr lang="en-US" dirty="0"/>
-          </a:p>
-          <a:p>
-            <a:endParaRPr lang="en-US" dirty="0"/>
-          </a:p>
-          <a:p>
-            <a:endParaRPr lang="en-US" dirty="0"/>
-          </a:p>
-          <a:p>
-            <a:endParaRPr lang="en-US" dirty="0"/>
-          </a:p>
-        </p:txBody>
-      </p:sp>
-      <p:sp>
-        <p:nvSpPr>
-          <p:cNvPr id="11" name="Rectangle 10">
-            <a:extLst>
-              <a:ext uri="{FF2B5EF4-FFF2-40B4-BE49-F238E27FC236}">
-                <a16:creationId xmlns:a16="http://schemas.microsoft.com/office/drawing/2014/main" id="{8F4BA701-71D7-A18E-8095-346584111632}"/>
-              </a:ext>
-            </a:extLst>
-          </p:cNvPr>
-          <p:cNvSpPr/>
-          <p:nvPr/>
-        </p:nvSpPr>
-        <p:spPr>
-          <a:xfrm>
-            <a:off x="4448919" y="1482774"/>
-            <a:ext cx="1203569" cy="562708"/>
-          </a:xfrm>
-          <a:prstGeom prst="rect">
-            <a:avLst/>
-          </a:prstGeom>
+            <a:pPr algn="ctr"/>
+            <a:r>
+              <a:rPr sz="1000" b="1" i="0" spc="150">
+                <a:solidFill>
+                  <a:srgbClr val="E879F9"/>
+                </a:solidFill>
+                <a:latin typeface="Calibri"/>
+              </a:rPr>
+              <a:t>4  ·  OUTPUTS</a:t>
+            </a:r>
+          </a:p>
+        </p:txBody>
+      </p:sp>
+      <p:sp>
+        <p:nvSpPr>
+          <p:cNvPr id="12" name="Rounded Rectangle 11"/>
+          <p:cNvSpPr/>
+          <p:nvPr/>
+        </p:nvSpPr>
+        <p:spPr>
+          <a:xfrm>
+            <a:off x="260000" y="1500000"/>
+            <a:ext cx="1460000" cy="540000"/>
+          </a:xfrm>
+          <a:prstGeom prst="roundRect">
+            <a:avLst>
+              <a:gd name="adj" fmla="val 12000"/>
+            </a:avLst>
+          </a:prstGeom>
+          <a:solidFill>
+            <a:srgbClr val="1E3A5F"/>
+          </a:solidFill>
+          <a:ln w="15875">
+            <a:solidFill>
+              <a:srgbClr val="3B7DDD"/>
+            </a:solidFill>
+          </a:ln>
         </p:spPr>
         <p:style>
-          <a:lnRef idx="2">
-            <a:schemeClr val="accent1">
-              <a:shade val="15000"/>
-            </a:schemeClr>
+          <a:lnRef idx="1">
+            <a:schemeClr val="accent1"/>
           </a:lnRef>
-          <a:fillRef idx="1">
+          <a:fillRef idx="3">
             <a:schemeClr val="accent1"/>
           </a:fillRef>
-          <a:effectRef idx="0">
+          <a:effectRef idx="2">
             <a:schemeClr val="accent1"/>
           </a:effectRef>
           <a:fontRef idx="minor">
@@ -2884,44 +2984,77 @@
           <a:lstStyle/>
           <a:p>
             <a:pPr algn="ctr"/>
-            <a:r>
-              <a:rPr lang="en-US" dirty="0"/>
-              <a:t>SWAT</a:t>
-            </a:r>
-          </a:p>
-        </p:txBody>
-      </p:sp>
-      <p:sp>
-        <p:nvSpPr>
-          <p:cNvPr id="12" name="Rectangle 11">
-            <a:extLst>
-              <a:ext uri="{FF2B5EF4-FFF2-40B4-BE49-F238E27FC236}">
-                <a16:creationId xmlns:a16="http://schemas.microsoft.com/office/drawing/2014/main" id="{035F7237-CDF1-BF21-E12A-AF374F763A33}"/>
-              </a:ext>
-            </a:extLst>
-          </p:cNvPr>
-          <p:cNvSpPr/>
-          <p:nvPr/>
-        </p:nvSpPr>
-        <p:spPr>
-          <a:xfrm>
-            <a:off x="4441995" y="2198288"/>
-            <a:ext cx="1203569" cy="562708"/>
+          </a:p>
+        </p:txBody>
+      </p:sp>
+      <p:sp>
+        <p:nvSpPr>
+          <p:cNvPr id="13" name="TextBox 12"/>
+          <p:cNvSpPr txBox="1"/>
+          <p:nvPr/>
+        </p:nvSpPr>
+        <p:spPr>
+          <a:xfrm>
+            <a:off x="260000" y="1500000"/>
+            <a:ext cx="1460000" cy="540000"/>
           </a:xfrm>
           <a:prstGeom prst="rect">
             <a:avLst/>
           </a:prstGeom>
+          <a:noFill/>
+        </p:spPr>
+        <p:txBody>
+          <a:bodyPr wrap="square" lIns="0" rIns="0" tIns="0" bIns="0" anchor="ctr">
+            <a:spAutoFit/>
+          </a:bodyPr>
+          <a:lstStyle/>
+          <a:p>
+            <a:pPr algn="ctr"/>
+            <a:r>
+              <a:rPr sz="1200" b="0" i="0">
+                <a:solidFill>
+                  <a:srgbClr val="FFFFFF"/>
+                </a:solidFill>
+                <a:latin typeface="Calibri"/>
+              </a:rPr>
+              <a:t>Geospatial data</a:t>
+            </a:r>
+          </a:p>
+        </p:txBody>
+      </p:sp>
+      <p:sp>
+        <p:nvSpPr>
+          <p:cNvPr id="14" name="Rounded Rectangle 13"/>
+          <p:cNvSpPr/>
+          <p:nvPr/>
+        </p:nvSpPr>
+        <p:spPr>
+          <a:xfrm>
+            <a:off x="260000" y="2120000"/>
+            <a:ext cx="1460000" cy="540000"/>
+          </a:xfrm>
+          <a:prstGeom prst="roundRect">
+            <a:avLst>
+              <a:gd name="adj" fmla="val 12000"/>
+            </a:avLst>
+          </a:prstGeom>
+          <a:solidFill>
+            <a:srgbClr val="1E3A5F"/>
+          </a:solidFill>
+          <a:ln w="15875">
+            <a:solidFill>
+              <a:srgbClr val="3B7DDD"/>
+            </a:solidFill>
+          </a:ln>
         </p:spPr>
         <p:style>
-          <a:lnRef idx="2">
-            <a:schemeClr val="accent1">
-              <a:shade val="15000"/>
-            </a:schemeClr>
+          <a:lnRef idx="1">
+            <a:schemeClr val="accent1"/>
           </a:lnRef>
-          <a:fillRef idx="1">
+          <a:fillRef idx="3">
             <a:schemeClr val="accent1"/>
           </a:fillRef>
-          <a:effectRef idx="0">
+          <a:effectRef idx="2">
             <a:schemeClr val="accent1"/>
           </a:effectRef>
           <a:fontRef idx="minor">
@@ -2933,113 +3066,195 @@
           <a:lstStyle/>
           <a:p>
             <a:pPr algn="ctr"/>
-            <a:r>
-              <a:rPr lang="en-US" dirty="0"/>
-              <a:t>DRASTIC</a:t>
-            </a:r>
-          </a:p>
-        </p:txBody>
-      </p:sp>
-      <p:sp>
-        <p:nvSpPr>
-          <p:cNvPr id="13" name="TextBox 12">
-            <a:extLst>
-              <a:ext uri="{FF2B5EF4-FFF2-40B4-BE49-F238E27FC236}">
-                <a16:creationId xmlns:a16="http://schemas.microsoft.com/office/drawing/2014/main" id="{76D67771-AE85-E7AE-25C5-31E4ED8AB683}"/>
-              </a:ext>
-            </a:extLst>
-          </p:cNvPr>
+          </a:p>
+        </p:txBody>
+      </p:sp>
+      <p:sp>
+        <p:nvSpPr>
+          <p:cNvPr id="15" name="TextBox 14"/>
           <p:cNvSpPr txBox="1"/>
           <p:nvPr/>
         </p:nvSpPr>
         <p:spPr>
           <a:xfrm>
-            <a:off x="5973999" y="1291839"/>
-            <a:ext cx="1203570" cy="1292662"/>
+            <a:off x="260000" y="2120000"/>
+            <a:ext cx="1460000" cy="540000"/>
           </a:xfrm>
           <a:prstGeom prst="rect">
             <a:avLst/>
           </a:prstGeom>
-          <a:solidFill>
-            <a:schemeClr val="accent2"/>
-          </a:solidFill>
-        </p:spPr>
-        <p:txBody>
-          <a:bodyPr wrap="square" rtlCol="0">
+          <a:noFill/>
+        </p:spPr>
+        <p:txBody>
+          <a:bodyPr wrap="square" lIns="0" rIns="0" tIns="0" bIns="0" anchor="ctr">
             <a:spAutoFit/>
           </a:bodyPr>
           <a:lstStyle/>
           <a:p>
-            <a:r>
-              <a:rPr lang="en-US" sz="1200" dirty="0"/>
-              <a:t>Dashboard/ database</a:t>
-            </a:r>
-          </a:p>
-          <a:p>
-            <a:endParaRPr lang="en-US" dirty="0"/>
-          </a:p>
-          <a:p>
-            <a:endParaRPr lang="en-US" dirty="0"/>
-          </a:p>
-          <a:p>
-            <a:endParaRPr lang="en-US" dirty="0"/>
-          </a:p>
-        </p:txBody>
-      </p:sp>
-      <p:sp>
-        <p:nvSpPr>
-          <p:cNvPr id="16" name="TextBox 15">
-            <a:extLst>
-              <a:ext uri="{FF2B5EF4-FFF2-40B4-BE49-F238E27FC236}">
-                <a16:creationId xmlns:a16="http://schemas.microsoft.com/office/drawing/2014/main" id="{B58CB717-FD9E-0ECF-4C18-FE052F205333}"/>
-              </a:ext>
-            </a:extLst>
-          </p:cNvPr>
+            <a:pPr algn="ctr"/>
+            <a:r>
+              <a:rPr sz="1200" b="0" i="0">
+                <a:solidFill>
+                  <a:srgbClr val="FFFFFF"/>
+                </a:solidFill>
+                <a:latin typeface="Calibri"/>
+              </a:rPr>
+              <a:t>Text documents</a:t>
+            </a:r>
+          </a:p>
+        </p:txBody>
+      </p:sp>
+      <p:sp>
+        <p:nvSpPr>
+          <p:cNvPr id="16" name="Rounded Rectangle 15"/>
+          <p:cNvSpPr/>
+          <p:nvPr/>
+        </p:nvSpPr>
+        <p:spPr>
+          <a:xfrm>
+            <a:off x="260000" y="2740000"/>
+            <a:ext cx="1460000" cy="700000"/>
+          </a:xfrm>
+          <a:prstGeom prst="roundRect">
+            <a:avLst>
+              <a:gd name="adj" fmla="val 12000"/>
+            </a:avLst>
+          </a:prstGeom>
+          <a:solidFill>
+            <a:srgbClr val="1E3A5F"/>
+          </a:solidFill>
+          <a:ln w="15875">
+            <a:solidFill>
+              <a:srgbClr val="3B7DDD"/>
+            </a:solidFill>
+          </a:ln>
+        </p:spPr>
+        <p:style>
+          <a:lnRef idx="1">
+            <a:schemeClr val="accent1"/>
+          </a:lnRef>
+          <a:fillRef idx="3">
+            <a:schemeClr val="accent1"/>
+          </a:fillRef>
+          <a:effectRef idx="2">
+            <a:schemeClr val="accent1"/>
+          </a:effectRef>
+          <a:fontRef idx="minor">
+            <a:schemeClr val="lt1"/>
+          </a:fontRef>
+        </p:style>
+        <p:txBody>
+          <a:bodyPr rtlCol="0" anchor="ctr"/>
+          <a:lstStyle/>
+          <a:p>
+            <a:pPr algn="ctr"/>
+          </a:p>
+        </p:txBody>
+      </p:sp>
+      <p:sp>
+        <p:nvSpPr>
+          <p:cNvPr id="17" name="TextBox 16"/>
           <p:cNvSpPr txBox="1"/>
           <p:nvPr/>
         </p:nvSpPr>
         <p:spPr>
           <a:xfrm>
-            <a:off x="118681" y="4466309"/>
-            <a:ext cx="8807938" cy="276999"/>
+            <a:off x="260000" y="2740000"/>
+            <a:ext cx="1460000" cy="700000"/>
           </a:xfrm>
           <a:prstGeom prst="rect">
             <a:avLst/>
           </a:prstGeom>
-          <a:solidFill>
-            <a:schemeClr val="accent2"/>
-          </a:solidFill>
-        </p:spPr>
-        <p:txBody>
-          <a:bodyPr wrap="square" rtlCol="0">
+          <a:noFill/>
+        </p:spPr>
+        <p:txBody>
+          <a:bodyPr wrap="square" lIns="0" rIns="0" tIns="0" bIns="0" anchor="ctr">
             <a:spAutoFit/>
           </a:bodyPr>
           <a:lstStyle/>
           <a:p>
             <a:pPr algn="ctr"/>
             <a:r>
-              <a:rPr lang="en-US" sz="1200" dirty="0"/>
-              <a:t>Python package</a:t>
-            </a:r>
-          </a:p>
-        </p:txBody>
-      </p:sp>
-      <p:sp>
-        <p:nvSpPr>
-          <p:cNvPr id="21" name="TextBox 20">
-            <a:extLst>
-              <a:ext uri="{FF2B5EF4-FFF2-40B4-BE49-F238E27FC236}">
-                <a16:creationId xmlns:a16="http://schemas.microsoft.com/office/drawing/2014/main" id="{D96491A3-9030-FBA8-43CE-D69F7555F2BA}"/>
-              </a:ext>
-            </a:extLst>
-          </p:cNvPr>
+              <a:rPr sz="1200" b="0" i="0">
+                <a:solidFill>
+                  <a:srgbClr val="FFFFFF"/>
+                </a:solidFill>
+                <a:latin typeface="Calibri"/>
+              </a:rPr>
+              <a:t>Weather data</a:t>
+            </a:r>
+          </a:p>
+          <a:p>
+            <a:pPr algn="ctr"/>
+            <a:r>
+              <a:rPr sz="1200" b="0" i="0">
+                <a:solidFill>
+                  <a:srgbClr val="FFFFFF"/>
+                </a:solidFill>
+                <a:latin typeface="Calibri"/>
+              </a:rPr>
+              <a:t>(historical + projected)</a:t>
+            </a:r>
+          </a:p>
+        </p:txBody>
+      </p:sp>
+      <p:sp>
+        <p:nvSpPr>
+          <p:cNvPr id="18" name="Rounded Rectangle 17"/>
+          <p:cNvSpPr/>
+          <p:nvPr/>
+        </p:nvSpPr>
+        <p:spPr>
+          <a:xfrm>
+            <a:off x="1940000" y="2000000"/>
+            <a:ext cx="1260000" cy="900000"/>
+          </a:xfrm>
+          <a:prstGeom prst="roundRect">
+            <a:avLst>
+              <a:gd name="adj" fmla="val 12000"/>
+            </a:avLst>
+          </a:prstGeom>
+          <a:solidFill>
+            <a:srgbClr val="3D2B00"/>
+          </a:solidFill>
+          <a:ln w="19050">
+            <a:solidFill>
+              <a:srgbClr val="D97706"/>
+            </a:solidFill>
+          </a:ln>
+        </p:spPr>
+        <p:style>
+          <a:lnRef idx="1">
+            <a:schemeClr val="accent1"/>
+          </a:lnRef>
+          <a:fillRef idx="3">
+            <a:schemeClr val="accent1"/>
+          </a:fillRef>
+          <a:effectRef idx="2">
+            <a:schemeClr val="accent1"/>
+          </a:effectRef>
+          <a:fontRef idx="minor">
+            <a:schemeClr val="lt1"/>
+          </a:fontRef>
+        </p:style>
+        <p:txBody>
+          <a:bodyPr rtlCol="0" anchor="ctr"/>
+          <a:lstStyle/>
+          <a:p>
+            <a:pPr algn="ctr"/>
+          </a:p>
+        </p:txBody>
+      </p:sp>
+      <p:sp>
+        <p:nvSpPr>
+          <p:cNvPr id="19" name="TextBox 18"/>
           <p:cNvSpPr txBox="1"/>
           <p:nvPr/>
         </p:nvSpPr>
         <p:spPr>
           <a:xfrm>
-            <a:off x="7528921" y="1473485"/>
-            <a:ext cx="1673824" cy="1015663"/>
+            <a:off x="1940000" y="2130000"/>
+            <a:ext cx="1260000" cy="380000"/>
           </a:xfrm>
           <a:prstGeom prst="rect">
             <a:avLst/>
@@ -3047,258 +3262,762 @@
           <a:noFill/>
         </p:spPr>
         <p:txBody>
-          <a:bodyPr wrap="square">
+          <a:bodyPr wrap="square" lIns="0" rIns="0" tIns="0" bIns="0" anchor="ctr">
             <a:spAutoFit/>
           </a:bodyPr>
           <a:lstStyle/>
           <a:p>
-            <a:r>
-              <a:rPr lang="en-US" sz="1200" dirty="0"/>
-              <a:t>Relative vulnerability index</a:t>
-            </a:r>
-          </a:p>
-          <a:p>
-            <a:endParaRPr lang="en-US" sz="1200" dirty="0"/>
-          </a:p>
-          <a:p>
-            <a:r>
-              <a:rPr lang="en-US" sz="1200" dirty="0"/>
-              <a:t>Water </a:t>
-            </a:r>
-            <a:r>
-              <a:rPr lang="en-US" sz="1200" dirty="0" err="1"/>
-              <a:t>avaibility</a:t>
-            </a:r>
-            <a:endParaRPr lang="en-US" sz="1200" dirty="0"/>
-          </a:p>
-          <a:p>
-            <a:r>
-              <a:rPr lang="en-US" sz="1200" dirty="0"/>
-              <a:t> </a:t>
-            </a:r>
-            <a:endParaRPr lang="en-US" dirty="0"/>
-          </a:p>
-        </p:txBody>
-      </p:sp>
-      <p:sp>
-        <p:nvSpPr>
-          <p:cNvPr id="25" name="TextBox 24">
-            <a:extLst>
-              <a:ext uri="{FF2B5EF4-FFF2-40B4-BE49-F238E27FC236}">
-                <a16:creationId xmlns:a16="http://schemas.microsoft.com/office/drawing/2014/main" id="{785462C9-C644-378F-7D5F-A80B8386A8AC}"/>
-              </a:ext>
-            </a:extLst>
-          </p:cNvPr>
+            <a:pPr algn="ctr"/>
+            <a:r>
+              <a:rPr sz="1500" b="1" i="0">
+                <a:solidFill>
+                  <a:srgbClr val="FFFFFF"/>
+                </a:solidFill>
+                <a:latin typeface="Calibri"/>
+              </a:rPr>
+              <a:t>Cassie LLM</a:t>
+            </a:r>
+          </a:p>
+        </p:txBody>
+      </p:sp>
+      <p:sp>
+        <p:nvSpPr>
+          <p:cNvPr id="20" name="TextBox 19"/>
           <p:cNvSpPr txBox="1"/>
           <p:nvPr/>
         </p:nvSpPr>
         <p:spPr>
           <a:xfrm>
-            <a:off x="5264335" y="3769789"/>
-            <a:ext cx="1203570" cy="461665"/>
+            <a:off x="1940000" y="2470000"/>
+            <a:ext cx="1260000" cy="320000"/>
           </a:xfrm>
           <a:prstGeom prst="rect">
             <a:avLst/>
           </a:prstGeom>
-          <a:solidFill>
-            <a:schemeClr val="accent2"/>
-          </a:solidFill>
-        </p:spPr>
-        <p:txBody>
-          <a:bodyPr wrap="square" rtlCol="0">
+          <a:noFill/>
+        </p:spPr>
+        <p:txBody>
+          <a:bodyPr wrap="square" lIns="0" rIns="0" tIns="0" bIns="0" anchor="ctr">
             <a:spAutoFit/>
           </a:bodyPr>
           <a:lstStyle/>
           <a:p>
-            <a:r>
-              <a:rPr lang="en-US" sz="1200" dirty="0"/>
-              <a:t>User inputs on process models</a:t>
-            </a:r>
-          </a:p>
-        </p:txBody>
-      </p:sp>
-      <p:sp>
-        <p:nvSpPr>
-          <p:cNvPr id="26" name="TextBox 25">
-            <a:extLst>
-              <a:ext uri="{FF2B5EF4-FFF2-40B4-BE49-F238E27FC236}">
-                <a16:creationId xmlns:a16="http://schemas.microsoft.com/office/drawing/2014/main" id="{466B9C61-2613-019F-6F07-D3E33B09EA68}"/>
-              </a:ext>
-            </a:extLst>
-          </p:cNvPr>
+            <a:pPr algn="ctr"/>
+            <a:r>
+              <a:rPr sz="1000" b="0" i="1">
+                <a:solidFill>
+                  <a:srgbClr val="FBBF24"/>
+                </a:solidFill>
+                <a:latin typeface="Calibri"/>
+              </a:rPr>
+              <a:t>adapted workflow</a:t>
+            </a:r>
+          </a:p>
+        </p:txBody>
+      </p:sp>
+      <p:sp>
+        <p:nvSpPr>
+          <p:cNvPr id="21" name="Rounded Rectangle 20"/>
+          <p:cNvSpPr/>
+          <p:nvPr/>
+        </p:nvSpPr>
+        <p:spPr>
+          <a:xfrm>
+            <a:off x="3420000" y="2330000"/>
+            <a:ext cx="1080000" cy="240000"/>
+          </a:xfrm>
+          <a:prstGeom prst="roundRect">
+            <a:avLst>
+              <a:gd name="adj" fmla="val 30000"/>
+            </a:avLst>
+          </a:prstGeom>
+          <a:solidFill>
+            <a:srgbClr val="D97706"/>
+          </a:solidFill>
+          <a:ln>
+            <a:noFill/>
+          </a:ln>
+        </p:spPr>
+        <p:style>
+          <a:lnRef idx="1">
+            <a:schemeClr val="accent1"/>
+          </a:lnRef>
+          <a:fillRef idx="3">
+            <a:schemeClr val="accent1"/>
+          </a:fillRef>
+          <a:effectRef idx="2">
+            <a:schemeClr val="accent1"/>
+          </a:effectRef>
+          <a:fontRef idx="minor">
+            <a:schemeClr val="lt1"/>
+          </a:fontRef>
+        </p:style>
+        <p:txBody>
+          <a:bodyPr rtlCol="0" anchor="ctr"/>
+          <a:lstStyle/>
+          <a:p>
+            <a:pPr algn="ctr"/>
+          </a:p>
+        </p:txBody>
+      </p:sp>
+      <p:sp>
+        <p:nvSpPr>
+          <p:cNvPr id="22" name="TextBox 21"/>
           <p:cNvSpPr txBox="1"/>
           <p:nvPr/>
         </p:nvSpPr>
         <p:spPr>
           <a:xfrm>
-            <a:off x="168025" y="89075"/>
-            <a:ext cx="1203570" cy="276999"/>
+            <a:off x="3420000" y="2330000"/>
+            <a:ext cx="1080000" cy="240000"/>
           </a:xfrm>
           <a:prstGeom prst="rect">
             <a:avLst/>
           </a:prstGeom>
-          <a:solidFill>
-            <a:schemeClr val="accent2"/>
-          </a:solidFill>
-        </p:spPr>
-        <p:txBody>
-          <a:bodyPr wrap="square" rtlCol="0">
+          <a:noFill/>
+        </p:spPr>
+        <p:txBody>
+          <a:bodyPr wrap="square" lIns="0" rIns="0" tIns="0" bIns="0" anchor="ctr">
             <a:spAutoFit/>
           </a:bodyPr>
           <a:lstStyle/>
           <a:p>
-            <a:r>
-              <a:rPr lang="en-US" sz="1200" dirty="0"/>
-              <a:t>Inputs</a:t>
-            </a:r>
-          </a:p>
-        </p:txBody>
-      </p:sp>
-      <p:sp>
-        <p:nvSpPr>
-          <p:cNvPr id="27" name="TextBox 26">
-            <a:extLst>
-              <a:ext uri="{FF2B5EF4-FFF2-40B4-BE49-F238E27FC236}">
-                <a16:creationId xmlns:a16="http://schemas.microsoft.com/office/drawing/2014/main" id="{B0515837-190A-4F93-A3A3-C4EEE671E152}"/>
-              </a:ext>
-            </a:extLst>
-          </p:cNvPr>
+            <a:pPr algn="ctr"/>
+            <a:r>
+              <a:rPr sz="900" b="1" i="0">
+                <a:solidFill>
+                  <a:srgbClr val="FFFFFF"/>
+                </a:solidFill>
+                <a:latin typeface="Calibri"/>
+              </a:rPr>
+              <a:t>GeoJSON + GeoTIFF</a:t>
+            </a:r>
+          </a:p>
+        </p:txBody>
+      </p:sp>
+      <p:sp>
+        <p:nvSpPr>
+          <p:cNvPr id="23" name="Rounded Rectangle 22"/>
+          <p:cNvSpPr/>
+          <p:nvPr/>
+        </p:nvSpPr>
+        <p:spPr>
+          <a:xfrm>
+            <a:off x="4720000" y="1900000"/>
+            <a:ext cx="1740000" cy="580000"/>
+          </a:xfrm>
+          <a:prstGeom prst="roundRect">
+            <a:avLst>
+              <a:gd name="adj" fmla="val 15000"/>
+            </a:avLst>
+          </a:prstGeom>
+          <a:solidFill>
+            <a:srgbClr val="0F3320"/>
+          </a:solidFill>
+          <a:ln w="19050">
+            <a:solidFill>
+              <a:srgbClr val="2E8B57"/>
+            </a:solidFill>
+          </a:ln>
+        </p:spPr>
+        <p:style>
+          <a:lnRef idx="1">
+            <a:schemeClr val="accent1"/>
+          </a:lnRef>
+          <a:fillRef idx="3">
+            <a:schemeClr val="accent1"/>
+          </a:fillRef>
+          <a:effectRef idx="2">
+            <a:schemeClr val="accent1"/>
+          </a:effectRef>
+          <a:fontRef idx="minor">
+            <a:schemeClr val="lt1"/>
+          </a:fontRef>
+        </p:style>
+        <p:txBody>
+          <a:bodyPr rtlCol="0" anchor="ctr"/>
+          <a:lstStyle/>
+          <a:p>
+            <a:pPr algn="ctr"/>
+          </a:p>
+        </p:txBody>
+      </p:sp>
+      <p:sp>
+        <p:nvSpPr>
+          <p:cNvPr id="24" name="TextBox 23"/>
           <p:cNvSpPr txBox="1"/>
           <p:nvPr/>
         </p:nvSpPr>
         <p:spPr>
           <a:xfrm>
-            <a:off x="2114395" y="110708"/>
-            <a:ext cx="1203570" cy="461665"/>
+            <a:off x="4720000" y="1900000"/>
+            <a:ext cx="1740000" cy="580000"/>
           </a:xfrm>
           <a:prstGeom prst="rect">
             <a:avLst/>
           </a:prstGeom>
-          <a:solidFill>
-            <a:schemeClr val="accent2"/>
-          </a:solidFill>
-        </p:spPr>
-        <p:txBody>
-          <a:bodyPr wrap="square" rtlCol="0">
+          <a:noFill/>
+        </p:spPr>
+        <p:txBody>
+          <a:bodyPr wrap="square" lIns="0" rIns="0" tIns="0" bIns="0" anchor="ctr">
             <a:spAutoFit/>
           </a:bodyPr>
           <a:lstStyle/>
           <a:p>
-            <a:r>
-              <a:rPr lang="en-US" sz="1200" dirty="0"/>
-              <a:t>Data harmonization</a:t>
-            </a:r>
-          </a:p>
-        </p:txBody>
-      </p:sp>
-      <p:sp>
-        <p:nvSpPr>
-          <p:cNvPr id="28" name="TextBox 27">
-            <a:extLst>
-              <a:ext uri="{FF2B5EF4-FFF2-40B4-BE49-F238E27FC236}">
-                <a16:creationId xmlns:a16="http://schemas.microsoft.com/office/drawing/2014/main" id="{CB4E1A78-47EC-3B32-C62A-0C457D24F968}"/>
-              </a:ext>
-            </a:extLst>
-          </p:cNvPr>
+            <a:pPr algn="ctr"/>
+            <a:r>
+              <a:rPr sz="1500" b="1" i="0">
+                <a:solidFill>
+                  <a:srgbClr val="FFFFFF"/>
+                </a:solidFill>
+                <a:latin typeface="Calibri"/>
+              </a:rPr>
+              <a:t>SWAT</a:t>
+            </a:r>
+          </a:p>
+        </p:txBody>
+      </p:sp>
+      <p:sp>
+        <p:nvSpPr>
+          <p:cNvPr id="25" name="Rounded Rectangle 24"/>
+          <p:cNvSpPr/>
+          <p:nvPr/>
+        </p:nvSpPr>
+        <p:spPr>
+          <a:xfrm>
+            <a:off x="4720000" y="2620000"/>
+            <a:ext cx="1740000" cy="580000"/>
+          </a:xfrm>
+          <a:prstGeom prst="roundRect">
+            <a:avLst>
+              <a:gd name="adj" fmla="val 15000"/>
+            </a:avLst>
+          </a:prstGeom>
+          <a:solidFill>
+            <a:srgbClr val="0F3320"/>
+          </a:solidFill>
+          <a:ln w="19050">
+            <a:solidFill>
+              <a:srgbClr val="2E8B57"/>
+            </a:solidFill>
+          </a:ln>
+        </p:spPr>
+        <p:style>
+          <a:lnRef idx="1">
+            <a:schemeClr val="accent1"/>
+          </a:lnRef>
+          <a:fillRef idx="3">
+            <a:schemeClr val="accent1"/>
+          </a:fillRef>
+          <a:effectRef idx="2">
+            <a:schemeClr val="accent1"/>
+          </a:effectRef>
+          <a:fontRef idx="minor">
+            <a:schemeClr val="lt1"/>
+          </a:fontRef>
+        </p:style>
+        <p:txBody>
+          <a:bodyPr rtlCol="0" anchor="ctr"/>
+          <a:lstStyle/>
+          <a:p>
+            <a:pPr algn="ctr"/>
+          </a:p>
+        </p:txBody>
+      </p:sp>
+      <p:sp>
+        <p:nvSpPr>
+          <p:cNvPr id="26" name="TextBox 25"/>
           <p:cNvSpPr txBox="1"/>
           <p:nvPr/>
         </p:nvSpPr>
         <p:spPr>
           <a:xfrm>
-            <a:off x="4060765" y="37105"/>
-            <a:ext cx="1203570" cy="276999"/>
+            <a:off x="4720000" y="2620000"/>
+            <a:ext cx="1740000" cy="580000"/>
           </a:xfrm>
           <a:prstGeom prst="rect">
             <a:avLst/>
           </a:prstGeom>
-          <a:solidFill>
-            <a:schemeClr val="accent2"/>
-          </a:solidFill>
-        </p:spPr>
-        <p:txBody>
-          <a:bodyPr wrap="square" rtlCol="0">
+          <a:noFill/>
+        </p:spPr>
+        <p:txBody>
+          <a:bodyPr wrap="square" lIns="0" rIns="0" tIns="0" bIns="0" anchor="ctr">
             <a:spAutoFit/>
           </a:bodyPr>
           <a:lstStyle/>
           <a:p>
-            <a:r>
-              <a:rPr lang="en-US" sz="1200" dirty="0"/>
-              <a:t>Process model</a:t>
-            </a:r>
-          </a:p>
-        </p:txBody>
-      </p:sp>
-      <p:sp>
-        <p:nvSpPr>
-          <p:cNvPr id="29" name="TextBox 28">
-            <a:extLst>
-              <a:ext uri="{FF2B5EF4-FFF2-40B4-BE49-F238E27FC236}">
-                <a16:creationId xmlns:a16="http://schemas.microsoft.com/office/drawing/2014/main" id="{12B821E0-0FA8-58C0-81CC-F6D6C5EE8CC5}"/>
-              </a:ext>
-            </a:extLst>
-          </p:cNvPr>
+            <a:pPr algn="ctr"/>
+            <a:r>
+              <a:rPr sz="1500" b="1" i="0">
+                <a:solidFill>
+                  <a:srgbClr val="FFFFFF"/>
+                </a:solidFill>
+                <a:latin typeface="Calibri"/>
+              </a:rPr>
+              <a:t>DRASTIC</a:t>
+            </a:r>
+          </a:p>
+        </p:txBody>
+      </p:sp>
+      <p:sp>
+        <p:nvSpPr>
+          <p:cNvPr id="27" name="Rounded Rectangle 26"/>
+          <p:cNvSpPr/>
+          <p:nvPr/>
+        </p:nvSpPr>
+        <p:spPr>
+          <a:xfrm>
+            <a:off x="4660000" y="3450000"/>
+            <a:ext cx="1860000" cy="460000"/>
+          </a:xfrm>
+          <a:prstGeom prst="roundRect">
+            <a:avLst>
+              <a:gd name="adj" fmla="val 30000"/>
+            </a:avLst>
+          </a:prstGeom>
+          <a:solidFill>
+            <a:srgbClr val="1B2A40"/>
+          </a:solidFill>
+          <a:ln w="12700">
+            <a:solidFill>
+              <a:srgbClr val="506A85"/>
+            </a:solidFill>
+          </a:ln>
+        </p:spPr>
+        <p:style>
+          <a:lnRef idx="1">
+            <a:schemeClr val="accent1"/>
+          </a:lnRef>
+          <a:fillRef idx="3">
+            <a:schemeClr val="accent1"/>
+          </a:fillRef>
+          <a:effectRef idx="2">
+            <a:schemeClr val="accent1"/>
+          </a:effectRef>
+          <a:fontRef idx="minor">
+            <a:schemeClr val="lt1"/>
+          </a:fontRef>
+        </p:style>
+        <p:txBody>
+          <a:bodyPr rtlCol="0" anchor="ctr"/>
+          <a:lstStyle/>
+          <a:p>
+            <a:pPr algn="ctr"/>
+          </a:p>
+        </p:txBody>
+      </p:sp>
+      <p:sp>
+        <p:nvSpPr>
+          <p:cNvPr id="28" name="TextBox 27"/>
           <p:cNvSpPr txBox="1"/>
           <p:nvPr/>
         </p:nvSpPr>
         <p:spPr>
           <a:xfrm>
-            <a:off x="6927136" y="129156"/>
-            <a:ext cx="1203570" cy="276999"/>
+            <a:off x="4660000" y="3450000"/>
+            <a:ext cx="1860000" cy="460000"/>
           </a:xfrm>
           <a:prstGeom prst="rect">
             <a:avLst/>
           </a:prstGeom>
-          <a:solidFill>
-            <a:schemeClr val="accent2"/>
-          </a:solidFill>
-        </p:spPr>
-        <p:txBody>
-          <a:bodyPr wrap="square" rtlCol="0">
+          <a:noFill/>
+        </p:spPr>
+        <p:txBody>
+          <a:bodyPr wrap="square" lIns="0" rIns="0" tIns="0" bIns="0" anchor="ctr">
             <a:spAutoFit/>
           </a:bodyPr>
           <a:lstStyle/>
           <a:p>
-            <a:r>
-              <a:rPr lang="en-US" sz="1200" dirty="0"/>
-              <a:t>Outputs</a:t>
+            <a:pPr algn="ctr"/>
+            <a:r>
+              <a:rPr sz="1000" b="0" i="1">
+                <a:solidFill>
+                  <a:srgbClr val="C8D8EA"/>
+                </a:solidFill>
+                <a:latin typeface="Calibri"/>
+              </a:rPr>
+              <a:t>User inputs on process models</a:t>
+            </a:r>
+          </a:p>
+        </p:txBody>
+      </p:sp>
+      <p:sp>
+        <p:nvSpPr>
+          <p:cNvPr id="29" name="Rounded Rectangle 28"/>
+          <p:cNvSpPr/>
+          <p:nvPr/>
+        </p:nvSpPr>
+        <p:spPr>
+          <a:xfrm>
+            <a:off x="6680000" y="1820000"/>
+            <a:ext cx="2200000" cy="560000"/>
+          </a:xfrm>
+          <a:prstGeom prst="roundRect">
+            <a:avLst>
+              <a:gd name="adj" fmla="val 15000"/>
+            </a:avLst>
+          </a:prstGeom>
+          <a:solidFill>
+            <a:srgbClr val="3B0D3A"/>
+          </a:solidFill>
+          <a:ln w="19050">
+            <a:solidFill>
+              <a:srgbClr val="C026D3"/>
+            </a:solidFill>
+          </a:ln>
+        </p:spPr>
+        <p:style>
+          <a:lnRef idx="1">
+            <a:schemeClr val="accent1"/>
+          </a:lnRef>
+          <a:fillRef idx="3">
+            <a:schemeClr val="accent1"/>
+          </a:fillRef>
+          <a:effectRef idx="2">
+            <a:schemeClr val="accent1"/>
+          </a:effectRef>
+          <a:fontRef idx="minor">
+            <a:schemeClr val="lt1"/>
+          </a:fontRef>
+        </p:style>
+        <p:txBody>
+          <a:bodyPr rtlCol="0" anchor="ctr"/>
+          <a:lstStyle/>
+          <a:p>
+            <a:pPr algn="ctr"/>
+          </a:p>
+        </p:txBody>
+      </p:sp>
+      <p:sp>
+        <p:nvSpPr>
+          <p:cNvPr id="30" name="TextBox 29"/>
+          <p:cNvSpPr txBox="1"/>
+          <p:nvPr/>
+        </p:nvSpPr>
+        <p:spPr>
+          <a:xfrm>
+            <a:off x="6680000" y="1820000"/>
+            <a:ext cx="2200000" cy="560000"/>
+          </a:xfrm>
+          <a:prstGeom prst="rect">
+            <a:avLst/>
+          </a:prstGeom>
+          <a:noFill/>
+        </p:spPr>
+        <p:txBody>
+          <a:bodyPr wrap="square" lIns="0" rIns="0" tIns="0" bIns="0" anchor="ctr">
+            <a:spAutoFit/>
+          </a:bodyPr>
+          <a:lstStyle/>
+          <a:p>
+            <a:pPr algn="ctr"/>
+            <a:r>
+              <a:rPr sz="1400" b="1" i="0">
+                <a:solidFill>
+                  <a:srgbClr val="FFFFFF"/>
+                </a:solidFill>
+                <a:latin typeface="Calibri"/>
+              </a:rPr>
+              <a:t>Dashboard / Database</a:t>
+            </a:r>
+          </a:p>
+        </p:txBody>
+      </p:sp>
+      <p:sp>
+        <p:nvSpPr>
+          <p:cNvPr id="31" name="Rounded Rectangle 30"/>
+          <p:cNvSpPr/>
+          <p:nvPr/>
+        </p:nvSpPr>
+        <p:spPr>
+          <a:xfrm>
+            <a:off x="6680000" y="2580000"/>
+            <a:ext cx="1070000" cy="920000"/>
+          </a:xfrm>
+          <a:prstGeom prst="roundRect">
+            <a:avLst>
+              <a:gd name="adj" fmla="val 18000"/>
+            </a:avLst>
+          </a:prstGeom>
+          <a:solidFill>
+            <a:srgbClr val="C026D3"/>
+          </a:solidFill>
+          <a:ln>
+            <a:noFill/>
+          </a:ln>
+        </p:spPr>
+        <p:style>
+          <a:lnRef idx="1">
+            <a:schemeClr val="accent1"/>
+          </a:lnRef>
+          <a:fillRef idx="3">
+            <a:schemeClr val="accent1"/>
+          </a:fillRef>
+          <a:effectRef idx="2">
+            <a:schemeClr val="accent1"/>
+          </a:effectRef>
+          <a:fontRef idx="minor">
+            <a:schemeClr val="lt1"/>
+          </a:fontRef>
+        </p:style>
+        <p:txBody>
+          <a:bodyPr rtlCol="0" anchor="ctr"/>
+          <a:lstStyle/>
+          <a:p>
+            <a:pPr algn="ctr"/>
+          </a:p>
+        </p:txBody>
+      </p:sp>
+      <p:sp>
+        <p:nvSpPr>
+          <p:cNvPr id="32" name="TextBox 31"/>
+          <p:cNvSpPr txBox="1"/>
+          <p:nvPr/>
+        </p:nvSpPr>
+        <p:spPr>
+          <a:xfrm>
+            <a:off x="6680000" y="2580000"/>
+            <a:ext cx="1070000" cy="920000"/>
+          </a:xfrm>
+          <a:prstGeom prst="rect">
+            <a:avLst/>
+          </a:prstGeom>
+          <a:noFill/>
+        </p:spPr>
+        <p:txBody>
+          <a:bodyPr wrap="square" lIns="0" rIns="0" tIns="0" bIns="0" anchor="ctr">
+            <a:spAutoFit/>
+          </a:bodyPr>
+          <a:lstStyle/>
+          <a:p>
+            <a:pPr algn="ctr"/>
+            <a:r>
+              <a:rPr sz="1200" b="1" i="0">
+                <a:solidFill>
+                  <a:srgbClr val="FFFFFF"/>
+                </a:solidFill>
+                <a:latin typeface="Calibri"/>
+              </a:rPr>
+              <a:t>Relative</a:t>
+            </a:r>
+          </a:p>
+          <a:p>
+            <a:pPr algn="ctr"/>
+            <a:r>
+              <a:rPr sz="1200" b="1" i="0">
+                <a:solidFill>
+                  <a:srgbClr val="FFFFFF"/>
+                </a:solidFill>
+                <a:latin typeface="Calibri"/>
+              </a:rPr>
+              <a:t>vulnerability index</a:t>
+            </a:r>
+          </a:p>
+        </p:txBody>
+      </p:sp>
+      <p:sp>
+        <p:nvSpPr>
+          <p:cNvPr id="33" name="Rounded Rectangle 32"/>
+          <p:cNvSpPr/>
+          <p:nvPr/>
+        </p:nvSpPr>
+        <p:spPr>
+          <a:xfrm>
+            <a:off x="7810000" y="2580000"/>
+            <a:ext cx="1070000" cy="920000"/>
+          </a:xfrm>
+          <a:prstGeom prst="roundRect">
+            <a:avLst>
+              <a:gd name="adj" fmla="val 18000"/>
+            </a:avLst>
+          </a:prstGeom>
+          <a:solidFill>
+            <a:srgbClr val="C026D3"/>
+          </a:solidFill>
+          <a:ln>
+            <a:noFill/>
+          </a:ln>
+        </p:spPr>
+        <p:style>
+          <a:lnRef idx="1">
+            <a:schemeClr val="accent1"/>
+          </a:lnRef>
+          <a:fillRef idx="3">
+            <a:schemeClr val="accent1"/>
+          </a:fillRef>
+          <a:effectRef idx="2">
+            <a:schemeClr val="accent1"/>
+          </a:effectRef>
+          <a:fontRef idx="minor">
+            <a:schemeClr val="lt1"/>
+          </a:fontRef>
+        </p:style>
+        <p:txBody>
+          <a:bodyPr rtlCol="0" anchor="ctr"/>
+          <a:lstStyle/>
+          <a:p>
+            <a:pPr algn="ctr"/>
+          </a:p>
+        </p:txBody>
+      </p:sp>
+      <p:sp>
+        <p:nvSpPr>
+          <p:cNvPr id="34" name="TextBox 33"/>
+          <p:cNvSpPr txBox="1"/>
+          <p:nvPr/>
+        </p:nvSpPr>
+        <p:spPr>
+          <a:xfrm>
+            <a:off x="7810000" y="2580000"/>
+            <a:ext cx="1070000" cy="920000"/>
+          </a:xfrm>
+          <a:prstGeom prst="rect">
+            <a:avLst/>
+          </a:prstGeom>
+          <a:noFill/>
+        </p:spPr>
+        <p:txBody>
+          <a:bodyPr wrap="square" lIns="0" rIns="0" tIns="0" bIns="0" anchor="ctr">
+            <a:spAutoFit/>
+          </a:bodyPr>
+          <a:lstStyle/>
+          <a:p>
+            <a:pPr algn="ctr"/>
+            <a:r>
+              <a:rPr sz="1200" b="1" i="0">
+                <a:solidFill>
+                  <a:srgbClr val="FFFFFF"/>
+                </a:solidFill>
+                <a:latin typeface="Calibri"/>
+              </a:rPr>
+              <a:t>Water</a:t>
+            </a:r>
+          </a:p>
+          <a:p>
+            <a:pPr algn="ctr"/>
+            <a:r>
+              <a:rPr sz="1200" b="1" i="0">
+                <a:solidFill>
+                  <a:srgbClr val="FFFFFF"/>
+                </a:solidFill>
+                <a:latin typeface="Calibri"/>
+              </a:rPr>
+              <a:t>availability</a:t>
+            </a:r>
+          </a:p>
+        </p:txBody>
+      </p:sp>
+      <p:sp>
+        <p:nvSpPr>
+          <p:cNvPr id="35" name="Rounded Rectangle 34"/>
+          <p:cNvSpPr/>
+          <p:nvPr/>
+        </p:nvSpPr>
+        <p:spPr>
+          <a:xfrm>
+            <a:off x="320000" y="4400000"/>
+            <a:ext cx="8504000" cy="320000"/>
+          </a:xfrm>
+          <a:prstGeom prst="roundRect">
+            <a:avLst>
+              <a:gd name="adj" fmla="val 15000"/>
+            </a:avLst>
+          </a:prstGeom>
+          <a:solidFill>
+            <a:srgbClr val="1B2A40"/>
+          </a:solidFill>
+          <a:ln w="12700">
+            <a:solidFill>
+              <a:srgbClr val="506A85"/>
+            </a:solidFill>
+          </a:ln>
+        </p:spPr>
+        <p:style>
+          <a:lnRef idx="1">
+            <a:schemeClr val="accent1"/>
+          </a:lnRef>
+          <a:fillRef idx="3">
+            <a:schemeClr val="accent1"/>
+          </a:fillRef>
+          <a:effectRef idx="2">
+            <a:schemeClr val="accent1"/>
+          </a:effectRef>
+          <a:fontRef idx="minor">
+            <a:schemeClr val="lt1"/>
+          </a:fontRef>
+        </p:style>
+        <p:txBody>
+          <a:bodyPr rtlCol="0" anchor="ctr"/>
+          <a:lstStyle/>
+          <a:p>
+            <a:pPr algn="ctr"/>
+          </a:p>
+        </p:txBody>
+      </p:sp>
+      <p:sp>
+        <p:nvSpPr>
+          <p:cNvPr id="36" name="TextBox 35"/>
+          <p:cNvSpPr txBox="1"/>
+          <p:nvPr/>
+        </p:nvSpPr>
+        <p:spPr>
+          <a:xfrm>
+            <a:off x="320000" y="4400000"/>
+            <a:ext cx="8504000" cy="320000"/>
+          </a:xfrm>
+          <a:prstGeom prst="rect">
+            <a:avLst/>
+          </a:prstGeom>
+          <a:noFill/>
+        </p:spPr>
+        <p:txBody>
+          <a:bodyPr wrap="square" lIns="0" rIns="0" tIns="0" bIns="0" anchor="ctr">
+            <a:spAutoFit/>
+          </a:bodyPr>
+          <a:lstStyle/>
+          <a:p>
+            <a:pPr algn="ctr"/>
+            <a:r>
+              <a:rPr sz="1100" b="1" i="1" spc="150">
+                <a:solidFill>
+                  <a:srgbClr val="8BA3BE"/>
+                </a:solidFill>
+                <a:latin typeface="Calibri"/>
+              </a:rPr>
+              <a:t>Python package  —  shared codebase across all stages</a:t>
             </a:r>
           </a:p>
         </p:txBody>
       </p:sp>
       <p:cxnSp>
         <p:nvCxnSpPr>
-          <p:cNvPr id="31" name="Straight Arrow Connector 30">
-            <a:extLst>
-              <a:ext uri="{FF2B5EF4-FFF2-40B4-BE49-F238E27FC236}">
-                <a16:creationId xmlns:a16="http://schemas.microsoft.com/office/drawing/2014/main" id="{1B4B6289-26D7-DE67-2B38-83E86F23C8C0}"/>
-              </a:ext>
-            </a:extLst>
-          </p:cNvPr>
-          <p:cNvCxnSpPr>
-            <a:cxnSpLocks/>
-          </p:cNvCxnSpPr>
+          <p:cNvPr id="37" name="Connector 36"/>
+          <p:cNvCxnSpPr/>
           <p:nvPr/>
         </p:nvCxnSpPr>
         <p:spPr>
-          <a:xfrm flipH="1" flipV="1">
-            <a:off x="5149516" y="3395113"/>
-            <a:ext cx="410858" cy="374676"/>
-          </a:xfrm>
-          <a:prstGeom prst="straightConnector1">
-            <a:avLst/>
-          </a:prstGeom>
-          <a:ln>
-            <a:tailEnd type="triangle"/>
+          <a:xfrm>
+            <a:off x="1720000" y="1770000"/>
+            <a:ext cx="220000" cy="480000"/>
+          </a:xfrm>
+          <a:prstGeom prst="line">
+            <a:avLst/>
+          </a:prstGeom>
+          <a:ln w="19050">
+            <a:solidFill>
+              <a:srgbClr val="8BA3BE"/>
+            </a:solidFill>
+            <a:tailEnd type="triangle" w="med" len="med"/>
           </a:ln>
         </p:spPr>
         <p:style>
-          <a:lnRef idx="1">
+          <a:lnRef idx="2">
             <a:schemeClr val="accent1"/>
           </a:lnRef>
           <a:fillRef idx="0">
             <a:schemeClr val="accent1"/>
           </a:fillRef>
-          <a:effectRef idx="0">
+          <a:effectRef idx="1">
             <a:schemeClr val="accent1"/>
           </a:effectRef>
           <a:fontRef idx="minor">
@@ -3308,38 +4027,33 @@
       </p:cxnSp>
       <p:cxnSp>
         <p:nvCxnSpPr>
-          <p:cNvPr id="34" name="Straight Arrow Connector 33">
-            <a:extLst>
-              <a:ext uri="{FF2B5EF4-FFF2-40B4-BE49-F238E27FC236}">
-                <a16:creationId xmlns:a16="http://schemas.microsoft.com/office/drawing/2014/main" id="{5D1A6C7A-420F-D341-F01C-33CE6331CA46}"/>
-              </a:ext>
-            </a:extLst>
-          </p:cNvPr>
-          <p:cNvCxnSpPr>
-            <a:cxnSpLocks/>
-          </p:cNvCxnSpPr>
+          <p:cNvPr id="38" name="Connector 37"/>
+          <p:cNvCxnSpPr/>
           <p:nvPr/>
         </p:nvCxnSpPr>
         <p:spPr>
-          <a:xfrm flipV="1">
-            <a:off x="5866120" y="2533637"/>
-            <a:ext cx="755131" cy="1287017"/>
-          </a:xfrm>
-          <a:prstGeom prst="straightConnector1">
-            <a:avLst/>
-          </a:prstGeom>
-          <a:ln>
-            <a:tailEnd type="triangle"/>
+          <a:xfrm>
+            <a:off x="1720000" y="2390000"/>
+            <a:ext cx="220000" cy="60000"/>
+          </a:xfrm>
+          <a:prstGeom prst="line">
+            <a:avLst/>
+          </a:prstGeom>
+          <a:ln w="19050">
+            <a:solidFill>
+              <a:srgbClr val="8BA3BE"/>
+            </a:solidFill>
+            <a:tailEnd type="triangle" w="med" len="med"/>
           </a:ln>
         </p:spPr>
         <p:style>
-          <a:lnRef idx="1">
+          <a:lnRef idx="2">
             <a:schemeClr val="accent1"/>
           </a:lnRef>
           <a:fillRef idx="0">
             <a:schemeClr val="accent1"/>
           </a:fillRef>
-          <a:effectRef idx="0">
+          <a:effectRef idx="1">
             <a:schemeClr val="accent1"/>
           </a:effectRef>
           <a:fontRef idx="minor">
@@ -3349,41 +4063,33 @@
       </p:cxnSp>
       <p:cxnSp>
         <p:nvCxnSpPr>
-          <p:cNvPr id="36" name="Straight Arrow Connector 35">
-            <a:extLst>
-              <a:ext uri="{FF2B5EF4-FFF2-40B4-BE49-F238E27FC236}">
-                <a16:creationId xmlns:a16="http://schemas.microsoft.com/office/drawing/2014/main" id="{D94E4004-25AB-BE24-F0A8-7BEC6247F79D}"/>
-              </a:ext>
-            </a:extLst>
-          </p:cNvPr>
-          <p:cNvCxnSpPr>
-            <a:cxnSpLocks/>
-          </p:cNvCxnSpPr>
+          <p:cNvPr id="39" name="Connector 38"/>
+          <p:cNvCxnSpPr/>
           <p:nvPr/>
         </p:nvCxnSpPr>
         <p:spPr>
-          <a:xfrm>
-            <a:off x="1281712" y="1303691"/>
-            <a:ext cx="276255" cy="289471"/>
-          </a:xfrm>
-          <a:prstGeom prst="straightConnector1">
-            <a:avLst/>
-          </a:prstGeom>
-          <a:ln w="34925">
+          <a:xfrm flipV="1">
+            <a:off x="1720000" y="2650000"/>
+            <a:ext cx="220000" cy="440000"/>
+          </a:xfrm>
+          <a:prstGeom prst="line">
+            <a:avLst/>
+          </a:prstGeom>
+          <a:ln w="19050">
             <a:solidFill>
-              <a:schemeClr val="tx1"/>
+              <a:srgbClr val="8BA3BE"/>
             </a:solidFill>
-            <a:tailEnd type="triangle"/>
+            <a:tailEnd type="triangle" w="med" len="med"/>
           </a:ln>
         </p:spPr>
         <p:style>
-          <a:lnRef idx="1">
+          <a:lnRef idx="2">
             <a:schemeClr val="accent1"/>
           </a:lnRef>
           <a:fillRef idx="0">
             <a:schemeClr val="accent1"/>
           </a:fillRef>
-          <a:effectRef idx="0">
+          <a:effectRef idx="1">
             <a:schemeClr val="accent1"/>
           </a:effectRef>
           <a:fontRef idx="minor">
@@ -3393,41 +4099,33 @@
       </p:cxnSp>
       <p:cxnSp>
         <p:nvCxnSpPr>
-          <p:cNvPr id="38" name="Straight Arrow Connector 37">
-            <a:extLst>
-              <a:ext uri="{FF2B5EF4-FFF2-40B4-BE49-F238E27FC236}">
-                <a16:creationId xmlns:a16="http://schemas.microsoft.com/office/drawing/2014/main" id="{F2903789-0697-AE84-06EA-41213CDD78EB}"/>
-              </a:ext>
-            </a:extLst>
-          </p:cNvPr>
-          <p:cNvCxnSpPr>
-            <a:cxnSpLocks/>
-          </p:cNvCxnSpPr>
+          <p:cNvPr id="40" name="Connector 39"/>
+          <p:cNvCxnSpPr/>
           <p:nvPr/>
         </p:nvCxnSpPr>
         <p:spPr>
           <a:xfrm>
-            <a:off x="1163891" y="2100735"/>
-            <a:ext cx="394076" cy="13998"/>
-          </a:xfrm>
-          <a:prstGeom prst="straightConnector1">
-            <a:avLst/>
-          </a:prstGeom>
-          <a:ln w="34925">
+            <a:off x="3200000" y="2450000"/>
+            <a:ext cx="220000" cy="0"/>
+          </a:xfrm>
+          <a:prstGeom prst="line">
+            <a:avLst/>
+          </a:prstGeom>
+          <a:ln w="19050">
             <a:solidFill>
-              <a:schemeClr val="tx1"/>
+              <a:srgbClr val="8BA3BE"/>
             </a:solidFill>
-            <a:tailEnd type="triangle"/>
+            <a:tailEnd type="triangle" w="med" len="med"/>
           </a:ln>
         </p:spPr>
         <p:style>
-          <a:lnRef idx="1">
+          <a:lnRef idx="2">
             <a:schemeClr val="accent1"/>
           </a:lnRef>
           <a:fillRef idx="0">
             <a:schemeClr val="accent1"/>
           </a:fillRef>
-          <a:effectRef idx="0">
+          <a:effectRef idx="1">
             <a:schemeClr val="accent1"/>
           </a:effectRef>
           <a:fontRef idx="minor">
@@ -3437,41 +4135,33 @@
       </p:cxnSp>
       <p:cxnSp>
         <p:nvCxnSpPr>
-          <p:cNvPr id="40" name="Straight Arrow Connector 39">
-            <a:extLst>
-              <a:ext uri="{FF2B5EF4-FFF2-40B4-BE49-F238E27FC236}">
-                <a16:creationId xmlns:a16="http://schemas.microsoft.com/office/drawing/2014/main" id="{2FA9A9A2-7978-EAF8-A3F9-8FEEE62AAF5C}"/>
-              </a:ext>
-            </a:extLst>
-          </p:cNvPr>
-          <p:cNvCxnSpPr>
-            <a:cxnSpLocks/>
-          </p:cNvCxnSpPr>
+          <p:cNvPr id="41" name="Connector 40"/>
+          <p:cNvCxnSpPr/>
           <p:nvPr/>
         </p:nvCxnSpPr>
         <p:spPr>
           <a:xfrm flipV="1">
-            <a:off x="1312248" y="2614814"/>
-            <a:ext cx="545428" cy="601047"/>
-          </a:xfrm>
-          <a:prstGeom prst="straightConnector1">
-            <a:avLst/>
-          </a:prstGeom>
-          <a:ln w="34925">
+            <a:off x="4500000" y="2190000"/>
+            <a:ext cx="220000" cy="260000"/>
+          </a:xfrm>
+          <a:prstGeom prst="line">
+            <a:avLst/>
+          </a:prstGeom>
+          <a:ln w="19050">
             <a:solidFill>
-              <a:schemeClr val="tx1"/>
+              <a:srgbClr val="8BA3BE"/>
             </a:solidFill>
-            <a:tailEnd type="triangle"/>
+            <a:tailEnd type="triangle" w="med" len="med"/>
           </a:ln>
         </p:spPr>
         <p:style>
-          <a:lnRef idx="1">
+          <a:lnRef idx="2">
             <a:schemeClr val="accent1"/>
           </a:lnRef>
           <a:fillRef idx="0">
             <a:schemeClr val="accent1"/>
           </a:fillRef>
-          <a:effectRef idx="0">
+          <a:effectRef idx="1">
             <a:schemeClr val="accent1"/>
           </a:effectRef>
           <a:fontRef idx="minor">
@@ -3481,41 +4171,33 @@
       </p:cxnSp>
       <p:cxnSp>
         <p:nvCxnSpPr>
-          <p:cNvPr id="43" name="Straight Arrow Connector 42">
-            <a:extLst>
-              <a:ext uri="{FF2B5EF4-FFF2-40B4-BE49-F238E27FC236}">
-                <a16:creationId xmlns:a16="http://schemas.microsoft.com/office/drawing/2014/main" id="{8DA1A880-08B7-8118-B435-3CA12C3D00DF}"/>
-              </a:ext>
-            </a:extLst>
-          </p:cNvPr>
-          <p:cNvCxnSpPr>
-            <a:cxnSpLocks/>
-          </p:cNvCxnSpPr>
+          <p:cNvPr id="42" name="Connector 41"/>
+          <p:cNvCxnSpPr/>
           <p:nvPr/>
         </p:nvCxnSpPr>
         <p:spPr>
           <a:xfrm>
-            <a:off x="2543835" y="1981316"/>
-            <a:ext cx="394076" cy="13998"/>
-          </a:xfrm>
-          <a:prstGeom prst="straightConnector1">
-            <a:avLst/>
-          </a:prstGeom>
-          <a:ln w="34925">
+            <a:off x="4500000" y="2450000"/>
+            <a:ext cx="220000" cy="460000"/>
+          </a:xfrm>
+          <a:prstGeom prst="line">
+            <a:avLst/>
+          </a:prstGeom>
+          <a:ln w="19050">
             <a:solidFill>
-              <a:schemeClr val="tx1"/>
+              <a:srgbClr val="8BA3BE"/>
             </a:solidFill>
-            <a:tailEnd type="triangle"/>
+            <a:tailEnd type="triangle" w="med" len="med"/>
           </a:ln>
         </p:spPr>
         <p:style>
-          <a:lnRef idx="1">
+          <a:lnRef idx="2">
             <a:schemeClr val="accent1"/>
           </a:lnRef>
           <a:fillRef idx="0">
             <a:schemeClr val="accent1"/>
           </a:fillRef>
-          <a:effectRef idx="0">
+          <a:effectRef idx="1">
             <a:schemeClr val="accent1"/>
           </a:effectRef>
           <a:fontRef idx="minor">
@@ -3525,41 +4207,33 @@
       </p:cxnSp>
       <p:cxnSp>
         <p:nvCxnSpPr>
-          <p:cNvPr id="44" name="Straight Arrow Connector 43">
-            <a:extLst>
-              <a:ext uri="{FF2B5EF4-FFF2-40B4-BE49-F238E27FC236}">
-                <a16:creationId xmlns:a16="http://schemas.microsoft.com/office/drawing/2014/main" id="{40A711C8-DD62-0C0A-7681-BF4E16B04071}"/>
-              </a:ext>
-            </a:extLst>
-          </p:cNvPr>
-          <p:cNvCxnSpPr>
-            <a:cxnSpLocks/>
-          </p:cNvCxnSpPr>
+          <p:cNvPr id="43" name="Connector 42"/>
+          <p:cNvCxnSpPr/>
           <p:nvPr/>
         </p:nvCxnSpPr>
         <p:spPr>
-          <a:xfrm>
-            <a:off x="3928600" y="1981316"/>
-            <a:ext cx="394076" cy="13998"/>
-          </a:xfrm>
-          <a:prstGeom prst="straightConnector1">
-            <a:avLst/>
-          </a:prstGeom>
-          <a:ln w="34925">
+          <a:xfrm flipV="1">
+            <a:off x="6460000" y="2100000"/>
+            <a:ext cx="220000" cy="90000"/>
+          </a:xfrm>
+          <a:prstGeom prst="line">
+            <a:avLst/>
+          </a:prstGeom>
+          <a:ln w="19050">
             <a:solidFill>
-              <a:schemeClr val="tx1"/>
+              <a:srgbClr val="8BA3BE"/>
             </a:solidFill>
-            <a:tailEnd type="triangle"/>
+            <a:tailEnd type="triangle" w="med" len="med"/>
           </a:ln>
         </p:spPr>
         <p:style>
-          <a:lnRef idx="1">
+          <a:lnRef idx="2">
             <a:schemeClr val="accent1"/>
           </a:lnRef>
           <a:fillRef idx="0">
             <a:schemeClr val="accent1"/>
           </a:fillRef>
-          <a:effectRef idx="0">
+          <a:effectRef idx="1">
             <a:schemeClr val="accent1"/>
           </a:effectRef>
           <a:fontRef idx="minor">
@@ -3569,41 +4243,33 @@
       </p:cxnSp>
       <p:cxnSp>
         <p:nvCxnSpPr>
-          <p:cNvPr id="45" name="Straight Arrow Connector 44">
-            <a:extLst>
-              <a:ext uri="{FF2B5EF4-FFF2-40B4-BE49-F238E27FC236}">
-                <a16:creationId xmlns:a16="http://schemas.microsoft.com/office/drawing/2014/main" id="{09F56356-8BF0-7260-394D-E742F31A33D9}"/>
-              </a:ext>
-            </a:extLst>
-          </p:cNvPr>
-          <p:cNvCxnSpPr>
-            <a:cxnSpLocks/>
-          </p:cNvCxnSpPr>
+          <p:cNvPr id="44" name="Connector 43"/>
+          <p:cNvCxnSpPr/>
           <p:nvPr/>
         </p:nvCxnSpPr>
         <p:spPr>
-          <a:xfrm>
-            <a:off x="5682971" y="2009409"/>
-            <a:ext cx="394076" cy="13998"/>
-          </a:xfrm>
-          <a:prstGeom prst="straightConnector1">
-            <a:avLst/>
-          </a:prstGeom>
-          <a:ln w="34925">
+          <a:xfrm flipV="1">
+            <a:off x="6460000" y="2100000"/>
+            <a:ext cx="220000" cy="810000"/>
+          </a:xfrm>
+          <a:prstGeom prst="line">
+            <a:avLst/>
+          </a:prstGeom>
+          <a:ln w="19050">
             <a:solidFill>
-              <a:schemeClr val="tx1"/>
+              <a:srgbClr val="8BA3BE"/>
             </a:solidFill>
-            <a:tailEnd type="triangle"/>
+            <a:tailEnd type="triangle" w="med" len="med"/>
           </a:ln>
         </p:spPr>
         <p:style>
-          <a:lnRef idx="1">
+          <a:lnRef idx="2">
             <a:schemeClr val="accent1"/>
           </a:lnRef>
           <a:fillRef idx="0">
             <a:schemeClr val="accent1"/>
           </a:fillRef>
-          <a:effectRef idx="0">
+          <a:effectRef idx="1">
             <a:schemeClr val="accent1"/>
           </a:effectRef>
           <a:fontRef idx="minor">
@@ -3613,41 +4279,33 @@
       </p:cxnSp>
       <p:cxnSp>
         <p:nvCxnSpPr>
-          <p:cNvPr id="46" name="Straight Arrow Connector 45">
-            <a:extLst>
-              <a:ext uri="{FF2B5EF4-FFF2-40B4-BE49-F238E27FC236}">
-                <a16:creationId xmlns:a16="http://schemas.microsoft.com/office/drawing/2014/main" id="{8B7F86AE-C10A-6FAA-94D2-5F6418AB91F3}"/>
-              </a:ext>
-            </a:extLst>
-          </p:cNvPr>
-          <p:cNvCxnSpPr>
-            <a:cxnSpLocks/>
-          </p:cNvCxnSpPr>
+          <p:cNvPr id="45" name="Connector 44"/>
+          <p:cNvCxnSpPr/>
           <p:nvPr/>
         </p:nvCxnSpPr>
         <p:spPr>
           <a:xfrm>
-            <a:off x="7018968" y="1924172"/>
-            <a:ext cx="509953" cy="190561"/>
-          </a:xfrm>
-          <a:prstGeom prst="straightConnector1">
-            <a:avLst/>
-          </a:prstGeom>
-          <a:ln w="34925">
+            <a:off x="7215000" y="2380000"/>
+            <a:ext cx="0" cy="200000"/>
+          </a:xfrm>
+          <a:prstGeom prst="line">
+            <a:avLst/>
+          </a:prstGeom>
+          <a:ln w="19050">
             <a:solidFill>
-              <a:schemeClr val="tx1"/>
+              <a:srgbClr val="8BA3BE"/>
             </a:solidFill>
-            <a:tailEnd type="triangle"/>
+            <a:tailEnd type="triangle" w="med" len="med"/>
           </a:ln>
         </p:spPr>
         <p:style>
-          <a:lnRef idx="1">
+          <a:lnRef idx="2">
             <a:schemeClr val="accent1"/>
           </a:lnRef>
           <a:fillRef idx="0">
             <a:schemeClr val="accent1"/>
           </a:fillRef>
-          <a:effectRef idx="0">
+          <a:effectRef idx="1">
             <a:schemeClr val="accent1"/>
           </a:effectRef>
           <a:fontRef idx="minor">
@@ -3657,41 +4315,105 @@
       </p:cxnSp>
       <p:cxnSp>
         <p:nvCxnSpPr>
-          <p:cNvPr id="48" name="Straight Arrow Connector 47">
-            <a:extLst>
-              <a:ext uri="{FF2B5EF4-FFF2-40B4-BE49-F238E27FC236}">
-                <a16:creationId xmlns:a16="http://schemas.microsoft.com/office/drawing/2014/main" id="{21F9ADF7-174E-ABFF-E16C-9A48D8707889}"/>
-              </a:ext>
-            </a:extLst>
-          </p:cNvPr>
-          <p:cNvCxnSpPr>
-            <a:cxnSpLocks/>
-          </p:cNvCxnSpPr>
+          <p:cNvPr id="46" name="Connector 45"/>
+          <p:cNvCxnSpPr/>
           <p:nvPr/>
         </p:nvCxnSpPr>
         <p:spPr>
-          <a:xfrm flipV="1">
-            <a:off x="6967843" y="1593162"/>
-            <a:ext cx="561078" cy="84670"/>
-          </a:xfrm>
-          <a:prstGeom prst="straightConnector1">
-            <a:avLst/>
-          </a:prstGeom>
-          <a:ln w="34925">
+          <a:xfrm>
+            <a:off x="8345000" y="2380000"/>
+            <a:ext cx="0" cy="200000"/>
+          </a:xfrm>
+          <a:prstGeom prst="line">
+            <a:avLst/>
+          </a:prstGeom>
+          <a:ln w="19050">
             <a:solidFill>
-              <a:schemeClr val="tx1"/>
+              <a:srgbClr val="8BA3BE"/>
             </a:solidFill>
-            <a:tailEnd type="triangle"/>
+            <a:tailEnd type="triangle" w="med" len="med"/>
           </a:ln>
         </p:spPr>
         <p:style>
-          <a:lnRef idx="1">
+          <a:lnRef idx="2">
             <a:schemeClr val="accent1"/>
           </a:lnRef>
           <a:fillRef idx="0">
             <a:schemeClr val="accent1"/>
           </a:fillRef>
-          <a:effectRef idx="0">
+          <a:effectRef idx="1">
+            <a:schemeClr val="accent1"/>
+          </a:effectRef>
+          <a:fontRef idx="minor">
+            <a:schemeClr val="tx1"/>
+          </a:fontRef>
+        </p:style>
+      </p:cxnSp>
+      <p:cxnSp>
+        <p:nvCxnSpPr>
+          <p:cNvPr id="47" name="Connector 46"/>
+          <p:cNvCxnSpPr/>
+          <p:nvPr/>
+        </p:nvCxnSpPr>
+        <p:spPr>
+          <a:xfrm flipV="1">
+            <a:off x="5590000" y="3200000"/>
+            <a:ext cx="0" cy="250000"/>
+          </a:xfrm>
+          <a:prstGeom prst="line">
+            <a:avLst/>
+          </a:prstGeom>
+          <a:ln w="19050">
+            <a:solidFill>
+              <a:srgbClr val="FBBF24"/>
+            </a:solidFill>
+            <a:tailEnd type="triangle" w="med" len="med"/>
+          </a:ln>
+        </p:spPr>
+        <p:style>
+          <a:lnRef idx="2">
+            <a:schemeClr val="accent1"/>
+          </a:lnRef>
+          <a:fillRef idx="0">
+            <a:schemeClr val="accent1"/>
+          </a:fillRef>
+          <a:effectRef idx="1">
+            <a:schemeClr val="accent1"/>
+          </a:effectRef>
+          <a:fontRef idx="minor">
+            <a:schemeClr val="tx1"/>
+          </a:fontRef>
+        </p:style>
+      </p:cxnSp>
+      <p:cxnSp>
+        <p:nvCxnSpPr>
+          <p:cNvPr id="48" name="Connector 47"/>
+          <p:cNvCxnSpPr/>
+          <p:nvPr/>
+        </p:nvCxnSpPr>
+        <p:spPr>
+          <a:xfrm flipV="1">
+            <a:off x="6400000" y="2300000"/>
+            <a:ext cx="280000" cy="1150000"/>
+          </a:xfrm>
+          <a:prstGeom prst="line">
+            <a:avLst/>
+          </a:prstGeom>
+          <a:ln w="19050">
+            <a:solidFill>
+              <a:srgbClr val="FBBF24"/>
+            </a:solidFill>
+            <a:tailEnd type="triangle" w="med" len="med"/>
+          </a:ln>
+        </p:spPr>
+        <p:style>
+          <a:lnRef idx="2">
+            <a:schemeClr val="accent1"/>
+          </a:lnRef>
+          <a:fillRef idx="0">
+            <a:schemeClr val="accent1"/>
+          </a:fillRef>
+          <a:effectRef idx="1">
             <a:schemeClr val="accent1"/>
           </a:effectRef>
           <a:fontRef idx="minor">
